--- a/Presentation.pptx
+++ b/Presentation.pptx
@@ -3399,6 +3399,42 @@
           </a:p>
         </p:txBody>
       </p:sp>
+      <p:pic>
+        <p:nvPicPr>
+          <p:cNvPr id="3" name="図 2">
+            <a:extLst>
+              <a:ext uri="{FF2B5EF4-FFF2-40B4-BE49-F238E27FC236}">
+                <a16:creationId xmlns:a16="http://schemas.microsoft.com/office/drawing/2014/main" id="{2C89C034-F81A-A414-ED1E-E74E9767D755}"/>
+              </a:ext>
+            </a:extLst>
+          </p:cNvPr>
+          <p:cNvPicPr>
+            <a:picLocks noChangeAspect="1"/>
+          </p:cNvPicPr>
+          <p:nvPr/>
+        </p:nvPicPr>
+        <p:blipFill>
+          <a:blip r:embed="rId2" cstate="print">
+            <a:extLst>
+              <a:ext uri="{28A0092B-C50C-407E-A947-70E740481C1C}">
+                <a14:useLocalDpi xmlns:a14="http://schemas.microsoft.com/office/drawing/2010/main" val="0"/>
+              </a:ext>
+            </a:extLst>
+          </a:blip>
+          <a:stretch>
+            <a:fillRect/>
+          </a:stretch>
+        </p:blipFill>
+        <p:spPr>
+          <a:xfrm>
+            <a:off x="9406533" y="191452"/>
+            <a:ext cx="2201267" cy="2201267"/>
+          </a:xfrm>
+          <a:prstGeom prst="rect">
+            <a:avLst/>
+          </a:prstGeom>
+        </p:spPr>
+      </p:pic>
     </p:spTree>
     <p:extLst>
       <p:ext uri="{BB962C8B-B14F-4D97-AF65-F5344CB8AC3E}">

--- a/Presentation.pptx
+++ b/Presentation.pptx
@@ -3298,7 +3298,7 @@
               <a:rPr lang="en-US" altLang="ja-JP" sz="2800" dirty="0" err="1">
                 <a:ea typeface="ＭＳ Ｐゴシック"/>
               </a:rPr>
-              <a:t>ot</a:t>
+              <a:t>eck</a:t>
             </a:r>
             <a:r>
               <a:rPr lang="en-US" altLang="ja-JP" sz="4000" dirty="0" err="1">
@@ -3307,13 +3307,13 @@
                 </a:solidFill>
                 <a:ea typeface="ＭＳ Ｐゴシック"/>
               </a:rPr>
-              <a:t>D</a:t>
+              <a:t>A</a:t>
             </a:r>
             <a:r>
               <a:rPr lang="en-US" altLang="ja-JP" sz="2800" dirty="0" err="1">
                 <a:ea typeface="ＭＳ Ｐゴシック"/>
               </a:rPr>
-              <a:t>eck</a:t>
+              <a:t>ction</a:t>
             </a:r>
             <a:r>
               <a:rPr lang="en-US" altLang="ja-JP" sz="4000" dirty="0" err="1">
@@ -3399,6 +3399,42 @@
           </a:p>
         </p:txBody>
       </p:sp>
+      <p:pic>
+        <p:nvPicPr>
+          <p:cNvPr id="3" name="図 2">
+            <a:extLst>
+              <a:ext uri="{FF2B5EF4-FFF2-40B4-BE49-F238E27FC236}">
+                <a16:creationId xmlns:a16="http://schemas.microsoft.com/office/drawing/2014/main" id="{A58F7361-FCAC-0565-9462-72C570AFB221}"/>
+              </a:ext>
+            </a:extLst>
+          </p:cNvPr>
+          <p:cNvPicPr>
+            <a:picLocks noChangeAspect="1"/>
+          </p:cNvPicPr>
+          <p:nvPr/>
+        </p:nvPicPr>
+        <p:blipFill>
+          <a:blip r:embed="rId2" cstate="print">
+            <a:extLst>
+              <a:ext uri="{28A0092B-C50C-407E-A947-70E740481C1C}">
+                <a14:useLocalDpi xmlns:a14="http://schemas.microsoft.com/office/drawing/2010/main" val="0"/>
+              </a:ext>
+            </a:extLst>
+          </a:blip>
+          <a:stretch>
+            <a:fillRect/>
+          </a:stretch>
+        </p:blipFill>
+        <p:spPr>
+          <a:xfrm>
+            <a:off x="8013643" y="-76257"/>
+            <a:ext cx="3505257" cy="3505257"/>
+          </a:xfrm>
+          <a:prstGeom prst="rect">
+            <a:avLst/>
+          </a:prstGeom>
+        </p:spPr>
+      </p:pic>
     </p:spTree>
     <p:extLst>
       <p:ext uri="{BB962C8B-B14F-4D97-AF65-F5344CB8AC3E}">
